--- a/中越詩歌/喜歡天_Ngày vui mừng.pptx
+++ b/中越詩歌/喜歡天_Ngày vui mừng.pptx
@@ -120,6 +120,11 @@
       </a:defRPr>
     </a:lvl9pPr>
   </p:defaultTextStyle>
+  <p:extLst>
+    <p:ext uri="{EFAFB233-063F-42B5-8137-9DF3F51BA10A}">
+      <p15:sldGuideLst xmlns:p15="http://schemas.microsoft.com/office/powerpoint/2012/main"/>
+    </p:ext>
+  </p:extLst>
 </p:presentation>
 </file>
 
@@ -161,7 +166,7 @@
           <a:lstStyle/>
           <a:p>
             <a:r>
-              <a:rPr lang="en-US" altLang="zh-TW" smtClean="0"/>
+              <a:rPr lang="en-US" altLang="zh-TW"/>
               <a:t>Click to edit Master title style</a:t>
             </a:r>
             <a:endParaRPr lang="zh-TW" altLang="en-US"/>
@@ -280,7 +285,7 @@
           </a:lstStyle>
           <a:p>
             <a:r>
-              <a:rPr lang="en-US" altLang="zh-TW" smtClean="0"/>
+              <a:rPr lang="en-US" altLang="zh-TW"/>
               <a:t>Click to edit Master subtitle style</a:t>
             </a:r>
             <a:endParaRPr lang="zh-TW" altLang="en-US"/>
@@ -304,7 +309,7 @@
           <a:p>
             <a:fld id="{EAFBEE92-56CC-4F21-BB75-A9B628D9238C}" type="datetimeFigureOut">
               <a:rPr lang="en-US" smtClean="0"/>
-              <a:t>10/28/2023</a:t>
+              <a:t>2/13/2025</a:t>
             </a:fld>
             <a:endParaRPr lang="en-US"/>
           </a:p>
@@ -398,7 +403,7 @@
           <a:lstStyle/>
           <a:p>
             <a:r>
-              <a:rPr lang="en-US" altLang="zh-TW" smtClean="0"/>
+              <a:rPr lang="en-US" altLang="zh-TW"/>
               <a:t>Click to edit Master title style</a:t>
             </a:r>
             <a:endParaRPr lang="zh-TW" altLang="en-US"/>
@@ -422,35 +427,35 @@
           <a:p>
             <a:pPr lvl="0"/>
             <a:r>
-              <a:rPr lang="en-US" altLang="zh-TW" smtClean="0"/>
+              <a:rPr lang="en-US" altLang="zh-TW"/>
               <a:t>Edit Master text styles</a:t>
             </a:r>
           </a:p>
           <a:p>
             <a:pPr lvl="1"/>
             <a:r>
-              <a:rPr lang="en-US" altLang="zh-TW" smtClean="0"/>
+              <a:rPr lang="en-US" altLang="zh-TW"/>
               <a:t>Second level</a:t>
             </a:r>
           </a:p>
           <a:p>
             <a:pPr lvl="2"/>
             <a:r>
-              <a:rPr lang="en-US" altLang="zh-TW" smtClean="0"/>
+              <a:rPr lang="en-US" altLang="zh-TW"/>
               <a:t>Third level</a:t>
             </a:r>
           </a:p>
           <a:p>
             <a:pPr lvl="3"/>
             <a:r>
-              <a:rPr lang="en-US" altLang="zh-TW" smtClean="0"/>
+              <a:rPr lang="en-US" altLang="zh-TW"/>
               <a:t>Fourth level</a:t>
             </a:r>
           </a:p>
           <a:p>
             <a:pPr lvl="4"/>
             <a:r>
-              <a:rPr lang="en-US" altLang="zh-TW" smtClean="0"/>
+              <a:rPr lang="en-US" altLang="zh-TW"/>
               <a:t>Fifth level</a:t>
             </a:r>
             <a:endParaRPr lang="zh-TW" altLang="en-US"/>
@@ -474,7 +479,7 @@
           <a:p>
             <a:fld id="{EAFBEE92-56CC-4F21-BB75-A9B628D9238C}" type="datetimeFigureOut">
               <a:rPr lang="en-US" smtClean="0"/>
-              <a:t>10/28/2023</a:t>
+              <a:t>2/13/2025</a:t>
             </a:fld>
             <a:endParaRPr lang="en-US"/>
           </a:p>
@@ -573,7 +578,7 @@
           <a:lstStyle/>
           <a:p>
             <a:r>
-              <a:rPr lang="en-US" altLang="zh-TW" smtClean="0"/>
+              <a:rPr lang="en-US" altLang="zh-TW"/>
               <a:t>Click to edit Master title style</a:t>
             </a:r>
             <a:endParaRPr lang="zh-TW" altLang="en-US"/>
@@ -602,35 +607,35 @@
           <a:p>
             <a:pPr lvl="0"/>
             <a:r>
-              <a:rPr lang="en-US" altLang="zh-TW" smtClean="0"/>
+              <a:rPr lang="en-US" altLang="zh-TW"/>
               <a:t>Edit Master text styles</a:t>
             </a:r>
           </a:p>
           <a:p>
             <a:pPr lvl="1"/>
             <a:r>
-              <a:rPr lang="en-US" altLang="zh-TW" smtClean="0"/>
+              <a:rPr lang="en-US" altLang="zh-TW"/>
               <a:t>Second level</a:t>
             </a:r>
           </a:p>
           <a:p>
             <a:pPr lvl="2"/>
             <a:r>
-              <a:rPr lang="en-US" altLang="zh-TW" smtClean="0"/>
+              <a:rPr lang="en-US" altLang="zh-TW"/>
               <a:t>Third level</a:t>
             </a:r>
           </a:p>
           <a:p>
             <a:pPr lvl="3"/>
             <a:r>
-              <a:rPr lang="en-US" altLang="zh-TW" smtClean="0"/>
+              <a:rPr lang="en-US" altLang="zh-TW"/>
               <a:t>Fourth level</a:t>
             </a:r>
           </a:p>
           <a:p>
             <a:pPr lvl="4"/>
             <a:r>
-              <a:rPr lang="en-US" altLang="zh-TW" smtClean="0"/>
+              <a:rPr lang="en-US" altLang="zh-TW"/>
               <a:t>Fifth level</a:t>
             </a:r>
             <a:endParaRPr lang="zh-TW" altLang="en-US"/>
@@ -654,7 +659,7 @@
           <a:p>
             <a:fld id="{EAFBEE92-56CC-4F21-BB75-A9B628D9238C}" type="datetimeFigureOut">
               <a:rPr lang="en-US" smtClean="0"/>
-              <a:t>10/28/2023</a:t>
+              <a:t>2/13/2025</a:t>
             </a:fld>
             <a:endParaRPr lang="en-US"/>
           </a:p>
@@ -748,7 +753,7 @@
           <a:lstStyle/>
           <a:p>
             <a:r>
-              <a:rPr lang="en-US" altLang="zh-TW" smtClean="0"/>
+              <a:rPr lang="en-US" altLang="zh-TW"/>
               <a:t>Click to edit Master title style</a:t>
             </a:r>
             <a:endParaRPr lang="zh-TW" altLang="en-US"/>
@@ -772,35 +777,35 @@
           <a:p>
             <a:pPr lvl="0"/>
             <a:r>
-              <a:rPr lang="en-US" altLang="zh-TW" smtClean="0"/>
+              <a:rPr lang="en-US" altLang="zh-TW"/>
               <a:t>Edit Master text styles</a:t>
             </a:r>
           </a:p>
           <a:p>
             <a:pPr lvl="1"/>
             <a:r>
-              <a:rPr lang="en-US" altLang="zh-TW" smtClean="0"/>
+              <a:rPr lang="en-US" altLang="zh-TW"/>
               <a:t>Second level</a:t>
             </a:r>
           </a:p>
           <a:p>
             <a:pPr lvl="2"/>
             <a:r>
-              <a:rPr lang="en-US" altLang="zh-TW" smtClean="0"/>
+              <a:rPr lang="en-US" altLang="zh-TW"/>
               <a:t>Third level</a:t>
             </a:r>
           </a:p>
           <a:p>
             <a:pPr lvl="3"/>
             <a:r>
-              <a:rPr lang="en-US" altLang="zh-TW" smtClean="0"/>
+              <a:rPr lang="en-US" altLang="zh-TW"/>
               <a:t>Fourth level</a:t>
             </a:r>
           </a:p>
           <a:p>
             <a:pPr lvl="4"/>
             <a:r>
-              <a:rPr lang="en-US" altLang="zh-TW" smtClean="0"/>
+              <a:rPr lang="en-US" altLang="zh-TW"/>
               <a:t>Fifth level</a:t>
             </a:r>
             <a:endParaRPr lang="zh-TW" altLang="en-US"/>
@@ -824,7 +829,7 @@
           <a:p>
             <a:fld id="{EAFBEE92-56CC-4F21-BB75-A9B628D9238C}" type="datetimeFigureOut">
               <a:rPr lang="en-US" smtClean="0"/>
-              <a:t>10/28/2023</a:t>
+              <a:t>2/13/2025</a:t>
             </a:fld>
             <a:endParaRPr lang="en-US"/>
           </a:p>
@@ -927,7 +932,7 @@
           </a:lstStyle>
           <a:p>
             <a:r>
-              <a:rPr lang="en-US" altLang="zh-TW" smtClean="0"/>
+              <a:rPr lang="en-US" altLang="zh-TW"/>
               <a:t>Click to edit Master title style</a:t>
             </a:r>
             <a:endParaRPr lang="zh-TW" altLang="en-US"/>
@@ -1047,7 +1052,7 @@
           <a:p>
             <a:pPr lvl="0"/>
             <a:r>
-              <a:rPr lang="en-US" altLang="zh-TW" smtClean="0"/>
+              <a:rPr lang="en-US" altLang="zh-TW"/>
               <a:t>Edit Master text styles</a:t>
             </a:r>
           </a:p>
@@ -1070,7 +1075,7 @@
           <a:p>
             <a:fld id="{EAFBEE92-56CC-4F21-BB75-A9B628D9238C}" type="datetimeFigureOut">
               <a:rPr lang="en-US" smtClean="0"/>
-              <a:t>10/28/2023</a:t>
+              <a:t>2/13/2025</a:t>
             </a:fld>
             <a:endParaRPr lang="en-US"/>
           </a:p>
@@ -1164,7 +1169,7 @@
           <a:lstStyle/>
           <a:p>
             <a:r>
-              <a:rPr lang="en-US" altLang="zh-TW" smtClean="0"/>
+              <a:rPr lang="en-US" altLang="zh-TW"/>
               <a:t>Click to edit Master title style</a:t>
             </a:r>
             <a:endParaRPr lang="zh-TW" altLang="en-US"/>
@@ -1221,35 +1226,35 @@
           <a:p>
             <a:pPr lvl="0"/>
             <a:r>
-              <a:rPr lang="en-US" altLang="zh-TW" smtClean="0"/>
+              <a:rPr lang="en-US" altLang="zh-TW"/>
               <a:t>Edit Master text styles</a:t>
             </a:r>
           </a:p>
           <a:p>
             <a:pPr lvl="1"/>
             <a:r>
-              <a:rPr lang="en-US" altLang="zh-TW" smtClean="0"/>
+              <a:rPr lang="en-US" altLang="zh-TW"/>
               <a:t>Second level</a:t>
             </a:r>
           </a:p>
           <a:p>
             <a:pPr lvl="2"/>
             <a:r>
-              <a:rPr lang="en-US" altLang="zh-TW" smtClean="0"/>
+              <a:rPr lang="en-US" altLang="zh-TW"/>
               <a:t>Third level</a:t>
             </a:r>
           </a:p>
           <a:p>
             <a:pPr lvl="3"/>
             <a:r>
-              <a:rPr lang="en-US" altLang="zh-TW" smtClean="0"/>
+              <a:rPr lang="en-US" altLang="zh-TW"/>
               <a:t>Fourth level</a:t>
             </a:r>
           </a:p>
           <a:p>
             <a:pPr lvl="4"/>
             <a:r>
-              <a:rPr lang="en-US" altLang="zh-TW" smtClean="0"/>
+              <a:rPr lang="en-US" altLang="zh-TW"/>
               <a:t>Fifth level</a:t>
             </a:r>
             <a:endParaRPr lang="zh-TW" altLang="en-US"/>
@@ -1306,35 +1311,35 @@
           <a:p>
             <a:pPr lvl="0"/>
             <a:r>
-              <a:rPr lang="en-US" altLang="zh-TW" smtClean="0"/>
+              <a:rPr lang="en-US" altLang="zh-TW"/>
               <a:t>Edit Master text styles</a:t>
             </a:r>
           </a:p>
           <a:p>
             <a:pPr lvl="1"/>
             <a:r>
-              <a:rPr lang="en-US" altLang="zh-TW" smtClean="0"/>
+              <a:rPr lang="en-US" altLang="zh-TW"/>
               <a:t>Second level</a:t>
             </a:r>
           </a:p>
           <a:p>
             <a:pPr lvl="2"/>
             <a:r>
-              <a:rPr lang="en-US" altLang="zh-TW" smtClean="0"/>
+              <a:rPr lang="en-US" altLang="zh-TW"/>
               <a:t>Third level</a:t>
             </a:r>
           </a:p>
           <a:p>
             <a:pPr lvl="3"/>
             <a:r>
-              <a:rPr lang="en-US" altLang="zh-TW" smtClean="0"/>
+              <a:rPr lang="en-US" altLang="zh-TW"/>
               <a:t>Fourth level</a:t>
             </a:r>
           </a:p>
           <a:p>
             <a:pPr lvl="4"/>
             <a:r>
-              <a:rPr lang="en-US" altLang="zh-TW" smtClean="0"/>
+              <a:rPr lang="en-US" altLang="zh-TW"/>
               <a:t>Fifth level</a:t>
             </a:r>
             <a:endParaRPr lang="zh-TW" altLang="en-US"/>
@@ -1358,7 +1363,7 @@
           <a:p>
             <a:fld id="{EAFBEE92-56CC-4F21-BB75-A9B628D9238C}" type="datetimeFigureOut">
               <a:rPr lang="en-US" smtClean="0"/>
-              <a:t>10/28/2023</a:t>
+              <a:t>2/13/2025</a:t>
             </a:fld>
             <a:endParaRPr lang="en-US"/>
           </a:p>
@@ -1456,7 +1461,7 @@
           </a:lstStyle>
           <a:p>
             <a:r>
-              <a:rPr lang="en-US" altLang="zh-TW" smtClean="0"/>
+              <a:rPr lang="en-US" altLang="zh-TW"/>
               <a:t>Click to edit Master title style</a:t>
             </a:r>
             <a:endParaRPr lang="zh-TW" altLang="en-US"/>
@@ -1522,7 +1527,7 @@
           <a:p>
             <a:pPr lvl="0"/>
             <a:r>
-              <a:rPr lang="en-US" altLang="zh-TW" smtClean="0"/>
+              <a:rPr lang="en-US" altLang="zh-TW"/>
               <a:t>Edit Master text styles</a:t>
             </a:r>
           </a:p>
@@ -1578,35 +1583,35 @@
           <a:p>
             <a:pPr lvl="0"/>
             <a:r>
-              <a:rPr lang="en-US" altLang="zh-TW" smtClean="0"/>
+              <a:rPr lang="en-US" altLang="zh-TW"/>
               <a:t>Edit Master text styles</a:t>
             </a:r>
           </a:p>
           <a:p>
             <a:pPr lvl="1"/>
             <a:r>
-              <a:rPr lang="en-US" altLang="zh-TW" smtClean="0"/>
+              <a:rPr lang="en-US" altLang="zh-TW"/>
               <a:t>Second level</a:t>
             </a:r>
           </a:p>
           <a:p>
             <a:pPr lvl="2"/>
             <a:r>
-              <a:rPr lang="en-US" altLang="zh-TW" smtClean="0"/>
+              <a:rPr lang="en-US" altLang="zh-TW"/>
               <a:t>Third level</a:t>
             </a:r>
           </a:p>
           <a:p>
             <a:pPr lvl="3"/>
             <a:r>
-              <a:rPr lang="en-US" altLang="zh-TW" smtClean="0"/>
+              <a:rPr lang="en-US" altLang="zh-TW"/>
               <a:t>Fourth level</a:t>
             </a:r>
           </a:p>
           <a:p>
             <a:pPr lvl="4"/>
             <a:r>
-              <a:rPr lang="en-US" altLang="zh-TW" smtClean="0"/>
+              <a:rPr lang="en-US" altLang="zh-TW"/>
               <a:t>Fifth level</a:t>
             </a:r>
             <a:endParaRPr lang="zh-TW" altLang="en-US"/>
@@ -1672,7 +1677,7 @@
           <a:p>
             <a:pPr lvl="0"/>
             <a:r>
-              <a:rPr lang="en-US" altLang="zh-TW" smtClean="0"/>
+              <a:rPr lang="en-US" altLang="zh-TW"/>
               <a:t>Edit Master text styles</a:t>
             </a:r>
           </a:p>
@@ -1728,35 +1733,35 @@
           <a:p>
             <a:pPr lvl="0"/>
             <a:r>
-              <a:rPr lang="en-US" altLang="zh-TW" smtClean="0"/>
+              <a:rPr lang="en-US" altLang="zh-TW"/>
               <a:t>Edit Master text styles</a:t>
             </a:r>
           </a:p>
           <a:p>
             <a:pPr lvl="1"/>
             <a:r>
-              <a:rPr lang="en-US" altLang="zh-TW" smtClean="0"/>
+              <a:rPr lang="en-US" altLang="zh-TW"/>
               <a:t>Second level</a:t>
             </a:r>
           </a:p>
           <a:p>
             <a:pPr lvl="2"/>
             <a:r>
-              <a:rPr lang="en-US" altLang="zh-TW" smtClean="0"/>
+              <a:rPr lang="en-US" altLang="zh-TW"/>
               <a:t>Third level</a:t>
             </a:r>
           </a:p>
           <a:p>
             <a:pPr lvl="3"/>
             <a:r>
-              <a:rPr lang="en-US" altLang="zh-TW" smtClean="0"/>
+              <a:rPr lang="en-US" altLang="zh-TW"/>
               <a:t>Fourth level</a:t>
             </a:r>
           </a:p>
           <a:p>
             <a:pPr lvl="4"/>
             <a:r>
-              <a:rPr lang="en-US" altLang="zh-TW" smtClean="0"/>
+              <a:rPr lang="en-US" altLang="zh-TW"/>
               <a:t>Fifth level</a:t>
             </a:r>
             <a:endParaRPr lang="zh-TW" altLang="en-US"/>
@@ -1780,7 +1785,7 @@
           <a:p>
             <a:fld id="{EAFBEE92-56CC-4F21-BB75-A9B628D9238C}" type="datetimeFigureOut">
               <a:rPr lang="en-US" smtClean="0"/>
-              <a:t>10/28/2023</a:t>
+              <a:t>2/13/2025</a:t>
             </a:fld>
             <a:endParaRPr lang="en-US"/>
           </a:p>
@@ -1874,7 +1879,7 @@
           <a:lstStyle/>
           <a:p>
             <a:r>
-              <a:rPr lang="en-US" altLang="zh-TW" smtClean="0"/>
+              <a:rPr lang="en-US" altLang="zh-TW"/>
               <a:t>Click to edit Master title style</a:t>
             </a:r>
             <a:endParaRPr lang="zh-TW" altLang="en-US"/>
@@ -1898,7 +1903,7 @@
           <a:p>
             <a:fld id="{EAFBEE92-56CC-4F21-BB75-A9B628D9238C}" type="datetimeFigureOut">
               <a:rPr lang="en-US" smtClean="0"/>
-              <a:t>10/28/2023</a:t>
+              <a:t>2/13/2025</a:t>
             </a:fld>
             <a:endParaRPr lang="en-US"/>
           </a:p>
@@ -1993,7 +1998,7 @@
           <a:p>
             <a:fld id="{EAFBEE92-56CC-4F21-BB75-A9B628D9238C}" type="datetimeFigureOut">
               <a:rPr lang="en-US" smtClean="0"/>
-              <a:t>10/28/2023</a:t>
+              <a:t>2/13/2025</a:t>
             </a:fld>
             <a:endParaRPr lang="en-US"/>
           </a:p>
@@ -2096,7 +2101,7 @@
           </a:lstStyle>
           <a:p>
             <a:r>
-              <a:rPr lang="en-US" altLang="zh-TW" smtClean="0"/>
+              <a:rPr lang="en-US" altLang="zh-TW"/>
               <a:t>Click to edit Master title style</a:t>
             </a:r>
             <a:endParaRPr lang="zh-TW" altLang="en-US"/>
@@ -2153,35 +2158,35 @@
           <a:p>
             <a:pPr lvl="0"/>
             <a:r>
-              <a:rPr lang="en-US" altLang="zh-TW" smtClean="0"/>
+              <a:rPr lang="en-US" altLang="zh-TW"/>
               <a:t>Edit Master text styles</a:t>
             </a:r>
           </a:p>
           <a:p>
             <a:pPr lvl="1"/>
             <a:r>
-              <a:rPr lang="en-US" altLang="zh-TW" smtClean="0"/>
+              <a:rPr lang="en-US" altLang="zh-TW"/>
               <a:t>Second level</a:t>
             </a:r>
           </a:p>
           <a:p>
             <a:pPr lvl="2"/>
             <a:r>
-              <a:rPr lang="en-US" altLang="zh-TW" smtClean="0"/>
+              <a:rPr lang="en-US" altLang="zh-TW"/>
               <a:t>Third level</a:t>
             </a:r>
           </a:p>
           <a:p>
             <a:pPr lvl="3"/>
             <a:r>
-              <a:rPr lang="en-US" altLang="zh-TW" smtClean="0"/>
+              <a:rPr lang="en-US" altLang="zh-TW"/>
               <a:t>Fourth level</a:t>
             </a:r>
           </a:p>
           <a:p>
             <a:pPr lvl="4"/>
             <a:r>
-              <a:rPr lang="en-US" altLang="zh-TW" smtClean="0"/>
+              <a:rPr lang="en-US" altLang="zh-TW"/>
               <a:t>Fifth level</a:t>
             </a:r>
             <a:endParaRPr lang="zh-TW" altLang="en-US"/>
@@ -2247,7 +2252,7 @@
           <a:p>
             <a:pPr lvl="0"/>
             <a:r>
-              <a:rPr lang="en-US" altLang="zh-TW" smtClean="0"/>
+              <a:rPr lang="en-US" altLang="zh-TW"/>
               <a:t>Edit Master text styles</a:t>
             </a:r>
           </a:p>
@@ -2270,7 +2275,7 @@
           <a:p>
             <a:fld id="{EAFBEE92-56CC-4F21-BB75-A9B628D9238C}" type="datetimeFigureOut">
               <a:rPr lang="en-US" smtClean="0"/>
-              <a:t>10/28/2023</a:t>
+              <a:t>2/13/2025</a:t>
             </a:fld>
             <a:endParaRPr lang="en-US"/>
           </a:p>
@@ -2373,7 +2378,7 @@
           </a:lstStyle>
           <a:p>
             <a:r>
-              <a:rPr lang="en-US" altLang="zh-TW" smtClean="0"/>
+              <a:rPr lang="en-US" altLang="zh-TW"/>
               <a:t>Click to edit Master title style</a:t>
             </a:r>
             <a:endParaRPr lang="zh-TW" altLang="en-US"/>
@@ -2438,7 +2443,7 @@
           </a:lstStyle>
           <a:p>
             <a:r>
-              <a:rPr lang="en-US" altLang="zh-TW" smtClean="0"/>
+              <a:rPr lang="en-US" altLang="zh-TW"/>
               <a:t>Click icon to add picture</a:t>
             </a:r>
             <a:endParaRPr lang="zh-TW" altLang="en-US"/>
@@ -2504,7 +2509,7 @@
           <a:p>
             <a:pPr lvl="0"/>
             <a:r>
-              <a:rPr lang="en-US" altLang="zh-TW" smtClean="0"/>
+              <a:rPr lang="en-US" altLang="zh-TW"/>
               <a:t>Edit Master text styles</a:t>
             </a:r>
           </a:p>
@@ -2527,7 +2532,7 @@
           <a:p>
             <a:fld id="{EAFBEE92-56CC-4F21-BB75-A9B628D9238C}" type="datetimeFigureOut">
               <a:rPr lang="en-US" smtClean="0"/>
-              <a:t>10/28/2023</a:t>
+              <a:t>2/13/2025</a:t>
             </a:fld>
             <a:endParaRPr lang="en-US"/>
           </a:p>
@@ -2641,10 +2646,9 @@
           <a:lstStyle/>
           <a:p>
             <a:r>
-              <a:rPr lang="zh-TW" altLang="en-US" smtClean="0"/>
+              <a:rPr lang="zh-TW" altLang="en-US"/>
               <a:t>按一下以編輯母片標題樣式</a:t>
             </a:r>
-            <a:endParaRPr lang="zh-TW" altLang="en-US"/>
           </a:p>
         </p:txBody>
       </p:sp>
@@ -2675,38 +2679,37 @@
           <a:p>
             <a:pPr lvl="0"/>
             <a:r>
-              <a:rPr lang="zh-TW" altLang="en-US" smtClean="0"/>
+              <a:rPr lang="zh-TW" altLang="en-US"/>
               <a:t>按一下以編輯母片文字樣式</a:t>
             </a:r>
           </a:p>
           <a:p>
             <a:pPr lvl="1"/>
             <a:r>
-              <a:rPr lang="zh-TW" altLang="en-US" smtClean="0"/>
+              <a:rPr lang="zh-TW" altLang="en-US"/>
               <a:t>第二層</a:t>
             </a:r>
           </a:p>
           <a:p>
             <a:pPr lvl="2"/>
             <a:r>
-              <a:rPr lang="zh-TW" altLang="en-US" smtClean="0"/>
+              <a:rPr lang="zh-TW" altLang="en-US"/>
               <a:t>第三層</a:t>
             </a:r>
           </a:p>
           <a:p>
             <a:pPr lvl="3"/>
             <a:r>
-              <a:rPr lang="zh-TW" altLang="en-US" smtClean="0"/>
+              <a:rPr lang="zh-TW" altLang="en-US"/>
               <a:t>第四層</a:t>
             </a:r>
           </a:p>
           <a:p>
             <a:pPr lvl="4"/>
             <a:r>
-              <a:rPr lang="zh-TW" altLang="en-US" smtClean="0"/>
+              <a:rPr lang="zh-TW" altLang="en-US"/>
               <a:t>第五層</a:t>
             </a:r>
-            <a:endParaRPr lang="zh-TW" altLang="en-US"/>
           </a:p>
         </p:txBody>
       </p:sp>
@@ -2745,7 +2748,7 @@
           <a:p>
             <a:fld id="{EAFBEE92-56CC-4F21-BB75-A9B628D9238C}" type="datetimeFigureOut">
               <a:rPr lang="en-US" smtClean="0"/>
-              <a:t>10/28/2023</a:t>
+              <a:t>2/13/2025</a:t>
             </a:fld>
             <a:endParaRPr lang="en-US"/>
           </a:p>
@@ -3173,24 +3176,7 @@
                 <a:latin typeface="微軟正黑體" pitchFamily="34" charset="-120"/>
                 <a:ea typeface="微軟正黑體" pitchFamily="34" charset="-120"/>
               </a:rPr>
-              <a:t>喜</a:t>
-            </a:r>
-            <a:r>
-              <a:rPr lang="zh-TW" altLang="en-US" sz="7200" b="1" i="1" dirty="0">
-                <a:solidFill>
-                  <a:srgbClr val="000066"/>
-                </a:solidFill>
-                <a:effectLst>
-                  <a:outerShdw blurRad="38100" dist="38100" dir="2700000" algn="tl">
-                    <a:srgbClr val="000000">
-                      <a:alpha val="43137"/>
-                    </a:srgbClr>
-                  </a:outerShdw>
-                </a:effectLst>
-                <a:latin typeface="微軟正黑體" pitchFamily="34" charset="-120"/>
-                <a:ea typeface="微軟正黑體" pitchFamily="34" charset="-120"/>
-              </a:rPr>
-              <a:t>歡天</a:t>
+              <a:t>喜歡天</a:t>
             </a:r>
           </a:p>
         </p:txBody>
@@ -3404,27 +3390,7 @@
                 <a:latin typeface="微軟正黑體" pitchFamily="34" charset="-120"/>
                 <a:ea typeface="微軟正黑體" pitchFamily="34" charset="-120"/>
               </a:rPr>
-              <a:t>喜歡天 </a:t>
-            </a:r>
-            <a:r>
-              <a:rPr lang="zh-TW" altLang="en-US" sz="6400" b="1" dirty="0">
-                <a:solidFill>
-                  <a:srgbClr val="000066"/>
-                </a:solidFill>
-                <a:latin typeface="微軟正黑體" pitchFamily="34" charset="-120"/>
-                <a:ea typeface="微軟正黑體" pitchFamily="34" charset="-120"/>
-              </a:rPr>
-              <a:t> 你</a:t>
-            </a:r>
-            <a:r>
-              <a:rPr lang="zh-TW" altLang="en-US" sz="6400" b="1" dirty="0">
-                <a:solidFill>
-                  <a:srgbClr val="000066"/>
-                </a:solidFill>
-                <a:latin typeface="微軟正黑體" pitchFamily="34" charset="-120"/>
-                <a:ea typeface="微軟正黑體" pitchFamily="34" charset="-120"/>
-              </a:rPr>
-              <a:t>可願</a:t>
+              <a:t>喜歡天  你可願</a:t>
             </a:r>
             <a:endParaRPr lang="en-US" altLang="zh-CN" sz="6400" b="1" dirty="0">
               <a:solidFill>
@@ -3769,16 +3735,7 @@
                 </a:solidFill>
                 <a:ea typeface="Microsoft JhengHei" panose="020B0604030504040204" pitchFamily="34" charset="-120"/>
               </a:rPr>
-              <a:t>2 </a:t>
-            </a:r>
-            <a:r>
-              <a:rPr lang="en-US" altLang="zh-CN" sz="3733" b="1" dirty="0">
-                <a:solidFill>
-                  <a:srgbClr val="000066"/>
-                </a:solidFill>
-                <a:ea typeface="Microsoft JhengHei" panose="020B0604030504040204" pitchFamily="34" charset="-120"/>
-              </a:rPr>
-              <a:t>/ 2</a:t>
+              <a:t>2 / 2</a:t>
             </a:r>
             <a:r>
               <a:rPr lang="en-US" sz="3733" b="1" dirty="0">
@@ -4228,16 +4185,7 @@
                 </a:solidFill>
                 <a:ea typeface="Microsoft JhengHei" panose="020B0604030504040204" pitchFamily="34" charset="-120"/>
               </a:rPr>
-              <a:t>2 </a:t>
-            </a:r>
-            <a:r>
-              <a:rPr lang="en-US" altLang="zh-CN" sz="3733" b="1" dirty="0">
-                <a:solidFill>
-                  <a:srgbClr val="000066"/>
-                </a:solidFill>
-                <a:ea typeface="Microsoft JhengHei" panose="020B0604030504040204" pitchFamily="34" charset="-120"/>
-              </a:rPr>
-              <a:t>/ 2</a:t>
+              <a:t>2 / 2</a:t>
             </a:r>
             <a:r>
               <a:rPr lang="en-US" sz="3733" b="1" dirty="0">
@@ -4555,16 +4503,7 @@
                 </a:solidFill>
                 <a:ea typeface="Microsoft JhengHei" panose="020B0604030504040204" pitchFamily="34" charset="-120"/>
               </a:rPr>
-              <a:t>2 </a:t>
-            </a:r>
-            <a:r>
-              <a:rPr lang="en-US" altLang="zh-CN" sz="3733" b="1" dirty="0">
-                <a:solidFill>
-                  <a:srgbClr val="000066"/>
-                </a:solidFill>
-                <a:ea typeface="Microsoft JhengHei" panose="020B0604030504040204" pitchFamily="34" charset="-120"/>
-              </a:rPr>
-              <a:t>/ 2</a:t>
+              <a:t>2 / 2</a:t>
             </a:r>
             <a:r>
               <a:rPr lang="en-US" sz="3733" b="1" dirty="0">
@@ -4841,18 +4780,7 @@
                 <a:ea typeface="微軟正黑體" pitchFamily="34" charset="-120"/>
                 <a:cs typeface="Calibri" panose="020F0502020204030204" pitchFamily="34" charset="0"/>
               </a:rPr>
-              <a:t>ời </a:t>
-            </a:r>
-            <a:r>
-              <a:rPr lang="vi-VN" b="1" dirty="0">
-                <a:solidFill>
-                  <a:srgbClr val="660033"/>
-                </a:solidFill>
-                <a:latin typeface="Calibri" panose="020F0502020204030204" pitchFamily="34" charset="0"/>
-                <a:ea typeface="微軟正黑體" pitchFamily="34" charset="-120"/>
-                <a:cs typeface="Calibri" panose="020F0502020204030204" pitchFamily="34" charset="0"/>
-              </a:rPr>
-              <a:t>Ngài ngự vào lòng bạn</a:t>
+              <a:t>ời Ngài ngự vào lòng bạn</a:t>
             </a:r>
             <a:endParaRPr lang="en-US" b="1" dirty="0">
               <a:solidFill>
@@ -4904,16 +4832,7 @@
                 </a:solidFill>
                 <a:ea typeface="Microsoft JhengHei" panose="020B0604030504040204" pitchFamily="34" charset="-120"/>
               </a:rPr>
-              <a:t>2 </a:t>
-            </a:r>
-            <a:r>
-              <a:rPr lang="en-US" altLang="zh-CN" sz="3733" b="1" dirty="0">
-                <a:solidFill>
-                  <a:srgbClr val="000066"/>
-                </a:solidFill>
-                <a:ea typeface="Microsoft JhengHei" panose="020B0604030504040204" pitchFamily="34" charset="-120"/>
-              </a:rPr>
-              <a:t>/ 2</a:t>
+              <a:t>2 / 2</a:t>
             </a:r>
             <a:r>
               <a:rPr lang="en-US" sz="3733" b="1" dirty="0">
@@ -5231,16 +5150,7 @@
                 </a:solidFill>
                 <a:ea typeface="Microsoft JhengHei" panose="020B0604030504040204" pitchFamily="34" charset="-120"/>
               </a:rPr>
-              <a:t>2 </a:t>
-            </a:r>
-            <a:r>
-              <a:rPr lang="en-US" altLang="zh-CN" sz="3733" b="1" dirty="0">
-                <a:solidFill>
-                  <a:srgbClr val="000066"/>
-                </a:solidFill>
-                <a:ea typeface="Microsoft JhengHei" panose="020B0604030504040204" pitchFamily="34" charset="-120"/>
-              </a:rPr>
-              <a:t>/ 2</a:t>
+              <a:t>2 / 2</a:t>
             </a:r>
             <a:r>
               <a:rPr lang="en-US" sz="3733" b="1" dirty="0">
@@ -5558,16 +5468,7 @@
                 </a:solidFill>
                 <a:ea typeface="Microsoft JhengHei" panose="020B0604030504040204" pitchFamily="34" charset="-120"/>
               </a:rPr>
-              <a:t>2 </a:t>
-            </a:r>
-            <a:r>
-              <a:rPr lang="en-US" altLang="zh-CN" sz="3733" b="1" dirty="0">
-                <a:solidFill>
-                  <a:srgbClr val="000066"/>
-                </a:solidFill>
-                <a:ea typeface="Microsoft JhengHei" panose="020B0604030504040204" pitchFamily="34" charset="-120"/>
-              </a:rPr>
-              <a:t>/ 2</a:t>
+              <a:t>2 / 2</a:t>
             </a:r>
             <a:r>
               <a:rPr lang="en-US" sz="3733" b="1" dirty="0">
@@ -5643,6 +5544,16 @@
               <a:buNone/>
             </a:pPr>
             <a:r>
+              <a:rPr lang="zh-CN" altLang="en-US" sz="6400" b="1" dirty="0">
+                <a:solidFill>
+                  <a:srgbClr val="000066"/>
+                </a:solidFill>
+                <a:latin typeface="微軟正黑體" pitchFamily="34" charset="-120"/>
+                <a:ea typeface="微軟正黑體" pitchFamily="34" charset="-120"/>
+              </a:rPr>
+              <a:t>你的</a:t>
+            </a:r>
+            <a:r>
               <a:rPr lang="zh-TW" altLang="en-US" sz="6400" b="1" dirty="0">
                 <a:solidFill>
                   <a:srgbClr val="000066"/>
@@ -5885,16 +5796,7 @@
                 </a:solidFill>
                 <a:ea typeface="Microsoft JhengHei" panose="020B0604030504040204" pitchFamily="34" charset="-120"/>
               </a:rPr>
-              <a:t>2 </a:t>
-            </a:r>
-            <a:r>
-              <a:rPr lang="en-US" altLang="zh-CN" sz="3733" b="1" dirty="0">
-                <a:solidFill>
-                  <a:srgbClr val="000066"/>
-                </a:solidFill>
-                <a:ea typeface="Microsoft JhengHei" panose="020B0604030504040204" pitchFamily="34" charset="-120"/>
-              </a:rPr>
-              <a:t>/ 2</a:t>
+              <a:t>2 / 2</a:t>
             </a:r>
             <a:r>
               <a:rPr lang="en-US" sz="3733" b="1" dirty="0">
@@ -6212,16 +6114,7 @@
                 </a:solidFill>
                 <a:ea typeface="Microsoft JhengHei" panose="020B0604030504040204" pitchFamily="34" charset="-120"/>
               </a:rPr>
-              <a:t>2 </a:t>
-            </a:r>
-            <a:r>
-              <a:rPr lang="en-US" altLang="zh-CN" sz="3733" b="1" dirty="0">
-                <a:solidFill>
-                  <a:srgbClr val="000066"/>
-                </a:solidFill>
-                <a:ea typeface="Microsoft JhengHei" panose="020B0604030504040204" pitchFamily="34" charset="-120"/>
-              </a:rPr>
-              <a:t>/ 2</a:t>
+              <a:t>2 / 2</a:t>
             </a:r>
             <a:r>
               <a:rPr lang="en-US" sz="3733" b="1" dirty="0">
@@ -6304,37 +6197,7 @@
                 <a:latin typeface="微軟正黑體" pitchFamily="34" charset="-120"/>
                 <a:ea typeface="微軟正黑體" pitchFamily="34" charset="-120"/>
               </a:rPr>
-              <a:t>喜</a:t>
-            </a:r>
-            <a:r>
-              <a:rPr lang="zh-TW" altLang="en-US" sz="6400" b="1" dirty="0">
-                <a:solidFill>
-                  <a:srgbClr val="000066"/>
-                </a:solidFill>
-                <a:latin typeface="微軟正黑體" pitchFamily="34" charset="-120"/>
-                <a:ea typeface="微軟正黑體" pitchFamily="34" charset="-120"/>
-              </a:rPr>
-              <a:t>歡天 </a:t>
-            </a:r>
-            <a:r>
-              <a:rPr lang="zh-TW" altLang="en-US" sz="6400" b="1" dirty="0">
-                <a:solidFill>
-                  <a:srgbClr val="000066"/>
-                </a:solidFill>
-                <a:latin typeface="微軟正黑體" pitchFamily="34" charset="-120"/>
-                <a:ea typeface="微軟正黑體" pitchFamily="34" charset="-120"/>
-              </a:rPr>
-              <a:t> 讚</a:t>
-            </a:r>
-            <a:r>
-              <a:rPr lang="zh-TW" altLang="en-US" sz="6400" b="1" dirty="0">
-                <a:solidFill>
-                  <a:srgbClr val="000066"/>
-                </a:solidFill>
-                <a:latin typeface="微軟正黑體" pitchFamily="34" charset="-120"/>
-                <a:ea typeface="微軟正黑體" pitchFamily="34" charset="-120"/>
-              </a:rPr>
-              <a:t>不斷</a:t>
+              <a:t>喜歡天  讚不斷</a:t>
             </a:r>
             <a:endParaRPr lang="en-US" altLang="zh-CN" sz="6400" b="1" dirty="0">
               <a:solidFill>
@@ -6611,16 +6474,7 @@
                 </a:solidFill>
                 <a:ea typeface="Microsoft JhengHei" panose="020B0604030504040204" pitchFamily="34" charset="-120"/>
               </a:rPr>
-              <a:t> </a:t>
-            </a:r>
-            <a:r>
-              <a:rPr lang="en-US" sz="3733" b="1" dirty="0">
-                <a:solidFill>
-                  <a:srgbClr val="000066"/>
-                </a:solidFill>
-                <a:ea typeface="Microsoft JhengHei" panose="020B0604030504040204" pitchFamily="34" charset="-120"/>
-              </a:rPr>
-              <a:t>)</a:t>
+              <a:t> )</a:t>
             </a:r>
             <a:endParaRPr lang="vi-VN" sz="3733" b="1" dirty="0">
               <a:solidFill>
@@ -8818,18 +8672,7 @@
                 <a:ea typeface="微軟正黑體" pitchFamily="34" charset="-120"/>
                 <a:cs typeface="Calibri" panose="020F0502020204030204" pitchFamily="34" charset="0"/>
               </a:rPr>
-              <a:t>ọc </a:t>
-            </a:r>
-            <a:r>
-              <a:rPr lang="vi-VN" b="1" dirty="0">
-                <a:solidFill>
-                  <a:srgbClr val="660033"/>
-                </a:solidFill>
-                <a:latin typeface="Calibri" panose="020F0502020204030204" pitchFamily="34" charset="0"/>
-                <a:ea typeface="微軟正黑體" pitchFamily="34" charset="-120"/>
-                <a:cs typeface="Calibri" panose="020F0502020204030204" pitchFamily="34" charset="0"/>
-              </a:rPr>
-              <a:t>theo gương thánh khiết của Chúa</a:t>
+              <a:t>ọc theo gương thánh khiết của Chúa</a:t>
             </a:r>
             <a:endParaRPr lang="en-US" b="1" dirty="0">
               <a:solidFill>
